--- a/因祂活著.pptx
+++ b/因祂活著.pptx
@@ -154,7 +154,7 @@
           <a:lstStyle/>
           <a:p>
             <a:r>
-              <a:rPr lang="en-US" altLang="zh-TW" smtClean="0"/>
+              <a:rPr lang="en-US" altLang="zh-TW"/>
               <a:t>Click to edit Master title style</a:t>
             </a:r>
             <a:endParaRPr lang="zh-TW" altLang="en-US"/>
@@ -273,7 +273,7 @@
           </a:lstStyle>
           <a:p>
             <a:r>
-              <a:rPr lang="en-US" altLang="zh-TW" smtClean="0"/>
+              <a:rPr lang="en-US" altLang="zh-TW"/>
               <a:t>Click to edit Master subtitle style</a:t>
             </a:r>
             <a:endParaRPr lang="zh-TW" altLang="en-US"/>
@@ -297,7 +297,7 @@
           <a:p>
             <a:fld id="{76993D8F-CF75-407B-8F8C-987B01043C6A}" type="datetimeFigureOut">
               <a:rPr lang="vi-VN" smtClean="0"/>
-              <a:t>08/10/2022</a:t>
+              <a:t>20/04/2024</a:t>
             </a:fld>
             <a:endParaRPr lang="vi-VN"/>
           </a:p>
@@ -391,7 +391,7 @@
           <a:lstStyle/>
           <a:p>
             <a:r>
-              <a:rPr lang="en-US" altLang="zh-TW" smtClean="0"/>
+              <a:rPr lang="en-US" altLang="zh-TW"/>
               <a:t>Click to edit Master title style</a:t>
             </a:r>
             <a:endParaRPr lang="zh-TW" altLang="en-US"/>
@@ -415,35 +415,35 @@
           <a:p>
             <a:pPr lvl="0"/>
             <a:r>
-              <a:rPr lang="en-US" altLang="zh-TW" smtClean="0"/>
+              <a:rPr lang="en-US" altLang="zh-TW"/>
               <a:t>Edit Master text styles</a:t>
             </a:r>
           </a:p>
           <a:p>
             <a:pPr lvl="1"/>
             <a:r>
-              <a:rPr lang="en-US" altLang="zh-TW" smtClean="0"/>
+              <a:rPr lang="en-US" altLang="zh-TW"/>
               <a:t>Second level</a:t>
             </a:r>
           </a:p>
           <a:p>
             <a:pPr lvl="2"/>
             <a:r>
-              <a:rPr lang="en-US" altLang="zh-TW" smtClean="0"/>
+              <a:rPr lang="en-US" altLang="zh-TW"/>
               <a:t>Third level</a:t>
             </a:r>
           </a:p>
           <a:p>
             <a:pPr lvl="3"/>
             <a:r>
-              <a:rPr lang="en-US" altLang="zh-TW" smtClean="0"/>
+              <a:rPr lang="en-US" altLang="zh-TW"/>
               <a:t>Fourth level</a:t>
             </a:r>
           </a:p>
           <a:p>
             <a:pPr lvl="4"/>
             <a:r>
-              <a:rPr lang="en-US" altLang="zh-TW" smtClean="0"/>
+              <a:rPr lang="en-US" altLang="zh-TW"/>
               <a:t>Fifth level</a:t>
             </a:r>
             <a:endParaRPr lang="zh-TW" altLang="en-US"/>
@@ -467,7 +467,7 @@
           <a:p>
             <a:fld id="{76993D8F-CF75-407B-8F8C-987B01043C6A}" type="datetimeFigureOut">
               <a:rPr lang="vi-VN" smtClean="0"/>
-              <a:t>08/10/2022</a:t>
+              <a:t>20/04/2024</a:t>
             </a:fld>
             <a:endParaRPr lang="vi-VN"/>
           </a:p>
@@ -566,7 +566,7 @@
           <a:lstStyle/>
           <a:p>
             <a:r>
-              <a:rPr lang="en-US" altLang="zh-TW" smtClean="0"/>
+              <a:rPr lang="en-US" altLang="zh-TW"/>
               <a:t>Click to edit Master title style</a:t>
             </a:r>
             <a:endParaRPr lang="zh-TW" altLang="en-US"/>
@@ -595,35 +595,35 @@
           <a:p>
             <a:pPr lvl="0"/>
             <a:r>
-              <a:rPr lang="en-US" altLang="zh-TW" smtClean="0"/>
+              <a:rPr lang="en-US" altLang="zh-TW"/>
               <a:t>Edit Master text styles</a:t>
             </a:r>
           </a:p>
           <a:p>
             <a:pPr lvl="1"/>
             <a:r>
-              <a:rPr lang="en-US" altLang="zh-TW" smtClean="0"/>
+              <a:rPr lang="en-US" altLang="zh-TW"/>
               <a:t>Second level</a:t>
             </a:r>
           </a:p>
           <a:p>
             <a:pPr lvl="2"/>
             <a:r>
-              <a:rPr lang="en-US" altLang="zh-TW" smtClean="0"/>
+              <a:rPr lang="en-US" altLang="zh-TW"/>
               <a:t>Third level</a:t>
             </a:r>
           </a:p>
           <a:p>
             <a:pPr lvl="3"/>
             <a:r>
-              <a:rPr lang="en-US" altLang="zh-TW" smtClean="0"/>
+              <a:rPr lang="en-US" altLang="zh-TW"/>
               <a:t>Fourth level</a:t>
             </a:r>
           </a:p>
           <a:p>
             <a:pPr lvl="4"/>
             <a:r>
-              <a:rPr lang="en-US" altLang="zh-TW" smtClean="0"/>
+              <a:rPr lang="en-US" altLang="zh-TW"/>
               <a:t>Fifth level</a:t>
             </a:r>
             <a:endParaRPr lang="zh-TW" altLang="en-US"/>
@@ -647,7 +647,7 @@
           <a:p>
             <a:fld id="{76993D8F-CF75-407B-8F8C-987B01043C6A}" type="datetimeFigureOut">
               <a:rPr lang="vi-VN" smtClean="0"/>
-              <a:t>08/10/2022</a:t>
+              <a:t>20/04/2024</a:t>
             </a:fld>
             <a:endParaRPr lang="vi-VN"/>
           </a:p>
@@ -741,7 +741,7 @@
           <a:lstStyle/>
           <a:p>
             <a:r>
-              <a:rPr lang="en-US" altLang="zh-TW" smtClean="0"/>
+              <a:rPr lang="en-US" altLang="zh-TW"/>
               <a:t>Click to edit Master title style</a:t>
             </a:r>
             <a:endParaRPr lang="zh-TW" altLang="en-US"/>
@@ -765,35 +765,35 @@
           <a:p>
             <a:pPr lvl="0"/>
             <a:r>
-              <a:rPr lang="en-US" altLang="zh-TW" smtClean="0"/>
+              <a:rPr lang="en-US" altLang="zh-TW"/>
               <a:t>Edit Master text styles</a:t>
             </a:r>
           </a:p>
           <a:p>
             <a:pPr lvl="1"/>
             <a:r>
-              <a:rPr lang="en-US" altLang="zh-TW" smtClean="0"/>
+              <a:rPr lang="en-US" altLang="zh-TW"/>
               <a:t>Second level</a:t>
             </a:r>
           </a:p>
           <a:p>
             <a:pPr lvl="2"/>
             <a:r>
-              <a:rPr lang="en-US" altLang="zh-TW" smtClean="0"/>
+              <a:rPr lang="en-US" altLang="zh-TW"/>
               <a:t>Third level</a:t>
             </a:r>
           </a:p>
           <a:p>
             <a:pPr lvl="3"/>
             <a:r>
-              <a:rPr lang="en-US" altLang="zh-TW" smtClean="0"/>
+              <a:rPr lang="en-US" altLang="zh-TW"/>
               <a:t>Fourth level</a:t>
             </a:r>
           </a:p>
           <a:p>
             <a:pPr lvl="4"/>
             <a:r>
-              <a:rPr lang="en-US" altLang="zh-TW" smtClean="0"/>
+              <a:rPr lang="en-US" altLang="zh-TW"/>
               <a:t>Fifth level</a:t>
             </a:r>
             <a:endParaRPr lang="zh-TW" altLang="en-US"/>
@@ -817,7 +817,7 @@
           <a:p>
             <a:fld id="{76993D8F-CF75-407B-8F8C-987B01043C6A}" type="datetimeFigureOut">
               <a:rPr lang="vi-VN" smtClean="0"/>
-              <a:t>08/10/2022</a:t>
+              <a:t>20/04/2024</a:t>
             </a:fld>
             <a:endParaRPr lang="vi-VN"/>
           </a:p>
@@ -920,7 +920,7 @@
           </a:lstStyle>
           <a:p>
             <a:r>
-              <a:rPr lang="en-US" altLang="zh-TW" smtClean="0"/>
+              <a:rPr lang="en-US" altLang="zh-TW"/>
               <a:t>Click to edit Master title style</a:t>
             </a:r>
             <a:endParaRPr lang="zh-TW" altLang="en-US"/>
@@ -1040,7 +1040,7 @@
           <a:p>
             <a:pPr lvl="0"/>
             <a:r>
-              <a:rPr lang="en-US" altLang="zh-TW" smtClean="0"/>
+              <a:rPr lang="en-US" altLang="zh-TW"/>
               <a:t>Edit Master text styles</a:t>
             </a:r>
           </a:p>
@@ -1063,7 +1063,7 @@
           <a:p>
             <a:fld id="{76993D8F-CF75-407B-8F8C-987B01043C6A}" type="datetimeFigureOut">
               <a:rPr lang="vi-VN" smtClean="0"/>
-              <a:t>08/10/2022</a:t>
+              <a:t>20/04/2024</a:t>
             </a:fld>
             <a:endParaRPr lang="vi-VN"/>
           </a:p>
@@ -1157,7 +1157,7 @@
           <a:lstStyle/>
           <a:p>
             <a:r>
-              <a:rPr lang="en-US" altLang="zh-TW" smtClean="0"/>
+              <a:rPr lang="en-US" altLang="zh-TW"/>
               <a:t>Click to edit Master title style</a:t>
             </a:r>
             <a:endParaRPr lang="zh-TW" altLang="en-US"/>
@@ -1214,35 +1214,35 @@
           <a:p>
             <a:pPr lvl="0"/>
             <a:r>
-              <a:rPr lang="en-US" altLang="zh-TW" smtClean="0"/>
+              <a:rPr lang="en-US" altLang="zh-TW"/>
               <a:t>Edit Master text styles</a:t>
             </a:r>
           </a:p>
           <a:p>
             <a:pPr lvl="1"/>
             <a:r>
-              <a:rPr lang="en-US" altLang="zh-TW" smtClean="0"/>
+              <a:rPr lang="en-US" altLang="zh-TW"/>
               <a:t>Second level</a:t>
             </a:r>
           </a:p>
           <a:p>
             <a:pPr lvl="2"/>
             <a:r>
-              <a:rPr lang="en-US" altLang="zh-TW" smtClean="0"/>
+              <a:rPr lang="en-US" altLang="zh-TW"/>
               <a:t>Third level</a:t>
             </a:r>
           </a:p>
           <a:p>
             <a:pPr lvl="3"/>
             <a:r>
-              <a:rPr lang="en-US" altLang="zh-TW" smtClean="0"/>
+              <a:rPr lang="en-US" altLang="zh-TW"/>
               <a:t>Fourth level</a:t>
             </a:r>
           </a:p>
           <a:p>
             <a:pPr lvl="4"/>
             <a:r>
-              <a:rPr lang="en-US" altLang="zh-TW" smtClean="0"/>
+              <a:rPr lang="en-US" altLang="zh-TW"/>
               <a:t>Fifth level</a:t>
             </a:r>
             <a:endParaRPr lang="zh-TW" altLang="en-US"/>
@@ -1299,35 +1299,35 @@
           <a:p>
             <a:pPr lvl="0"/>
             <a:r>
-              <a:rPr lang="en-US" altLang="zh-TW" smtClean="0"/>
+              <a:rPr lang="en-US" altLang="zh-TW"/>
               <a:t>Edit Master text styles</a:t>
             </a:r>
           </a:p>
           <a:p>
             <a:pPr lvl="1"/>
             <a:r>
-              <a:rPr lang="en-US" altLang="zh-TW" smtClean="0"/>
+              <a:rPr lang="en-US" altLang="zh-TW"/>
               <a:t>Second level</a:t>
             </a:r>
           </a:p>
           <a:p>
             <a:pPr lvl="2"/>
             <a:r>
-              <a:rPr lang="en-US" altLang="zh-TW" smtClean="0"/>
+              <a:rPr lang="en-US" altLang="zh-TW"/>
               <a:t>Third level</a:t>
             </a:r>
           </a:p>
           <a:p>
             <a:pPr lvl="3"/>
             <a:r>
-              <a:rPr lang="en-US" altLang="zh-TW" smtClean="0"/>
+              <a:rPr lang="en-US" altLang="zh-TW"/>
               <a:t>Fourth level</a:t>
             </a:r>
           </a:p>
           <a:p>
             <a:pPr lvl="4"/>
             <a:r>
-              <a:rPr lang="en-US" altLang="zh-TW" smtClean="0"/>
+              <a:rPr lang="en-US" altLang="zh-TW"/>
               <a:t>Fifth level</a:t>
             </a:r>
             <a:endParaRPr lang="zh-TW" altLang="en-US"/>
@@ -1351,7 +1351,7 @@
           <a:p>
             <a:fld id="{76993D8F-CF75-407B-8F8C-987B01043C6A}" type="datetimeFigureOut">
               <a:rPr lang="vi-VN" smtClean="0"/>
-              <a:t>08/10/2022</a:t>
+              <a:t>20/04/2024</a:t>
             </a:fld>
             <a:endParaRPr lang="vi-VN"/>
           </a:p>
@@ -1449,7 +1449,7 @@
           </a:lstStyle>
           <a:p>
             <a:r>
-              <a:rPr lang="en-US" altLang="zh-TW" smtClean="0"/>
+              <a:rPr lang="en-US" altLang="zh-TW"/>
               <a:t>Click to edit Master title style</a:t>
             </a:r>
             <a:endParaRPr lang="zh-TW" altLang="en-US"/>
@@ -1515,7 +1515,7 @@
           <a:p>
             <a:pPr lvl="0"/>
             <a:r>
-              <a:rPr lang="en-US" altLang="zh-TW" smtClean="0"/>
+              <a:rPr lang="en-US" altLang="zh-TW"/>
               <a:t>Edit Master text styles</a:t>
             </a:r>
           </a:p>
@@ -1571,35 +1571,35 @@
           <a:p>
             <a:pPr lvl="0"/>
             <a:r>
-              <a:rPr lang="en-US" altLang="zh-TW" smtClean="0"/>
+              <a:rPr lang="en-US" altLang="zh-TW"/>
               <a:t>Edit Master text styles</a:t>
             </a:r>
           </a:p>
           <a:p>
             <a:pPr lvl="1"/>
             <a:r>
-              <a:rPr lang="en-US" altLang="zh-TW" smtClean="0"/>
+              <a:rPr lang="en-US" altLang="zh-TW"/>
               <a:t>Second level</a:t>
             </a:r>
           </a:p>
           <a:p>
             <a:pPr lvl="2"/>
             <a:r>
-              <a:rPr lang="en-US" altLang="zh-TW" smtClean="0"/>
+              <a:rPr lang="en-US" altLang="zh-TW"/>
               <a:t>Third level</a:t>
             </a:r>
           </a:p>
           <a:p>
             <a:pPr lvl="3"/>
             <a:r>
-              <a:rPr lang="en-US" altLang="zh-TW" smtClean="0"/>
+              <a:rPr lang="en-US" altLang="zh-TW"/>
               <a:t>Fourth level</a:t>
             </a:r>
           </a:p>
           <a:p>
             <a:pPr lvl="4"/>
             <a:r>
-              <a:rPr lang="en-US" altLang="zh-TW" smtClean="0"/>
+              <a:rPr lang="en-US" altLang="zh-TW"/>
               <a:t>Fifth level</a:t>
             </a:r>
             <a:endParaRPr lang="zh-TW" altLang="en-US"/>
@@ -1665,7 +1665,7 @@
           <a:p>
             <a:pPr lvl="0"/>
             <a:r>
-              <a:rPr lang="en-US" altLang="zh-TW" smtClean="0"/>
+              <a:rPr lang="en-US" altLang="zh-TW"/>
               <a:t>Edit Master text styles</a:t>
             </a:r>
           </a:p>
@@ -1721,35 +1721,35 @@
           <a:p>
             <a:pPr lvl="0"/>
             <a:r>
-              <a:rPr lang="en-US" altLang="zh-TW" smtClean="0"/>
+              <a:rPr lang="en-US" altLang="zh-TW"/>
               <a:t>Edit Master text styles</a:t>
             </a:r>
           </a:p>
           <a:p>
             <a:pPr lvl="1"/>
             <a:r>
-              <a:rPr lang="en-US" altLang="zh-TW" smtClean="0"/>
+              <a:rPr lang="en-US" altLang="zh-TW"/>
               <a:t>Second level</a:t>
             </a:r>
           </a:p>
           <a:p>
             <a:pPr lvl="2"/>
             <a:r>
-              <a:rPr lang="en-US" altLang="zh-TW" smtClean="0"/>
+              <a:rPr lang="en-US" altLang="zh-TW"/>
               <a:t>Third level</a:t>
             </a:r>
           </a:p>
           <a:p>
             <a:pPr lvl="3"/>
             <a:r>
-              <a:rPr lang="en-US" altLang="zh-TW" smtClean="0"/>
+              <a:rPr lang="en-US" altLang="zh-TW"/>
               <a:t>Fourth level</a:t>
             </a:r>
           </a:p>
           <a:p>
             <a:pPr lvl="4"/>
             <a:r>
-              <a:rPr lang="en-US" altLang="zh-TW" smtClean="0"/>
+              <a:rPr lang="en-US" altLang="zh-TW"/>
               <a:t>Fifth level</a:t>
             </a:r>
             <a:endParaRPr lang="zh-TW" altLang="en-US"/>
@@ -1773,7 +1773,7 @@
           <a:p>
             <a:fld id="{76993D8F-CF75-407B-8F8C-987B01043C6A}" type="datetimeFigureOut">
               <a:rPr lang="vi-VN" smtClean="0"/>
-              <a:t>08/10/2022</a:t>
+              <a:t>20/04/2024</a:t>
             </a:fld>
             <a:endParaRPr lang="vi-VN"/>
           </a:p>
@@ -1867,7 +1867,7 @@
           <a:lstStyle/>
           <a:p>
             <a:r>
-              <a:rPr lang="en-US" altLang="zh-TW" smtClean="0"/>
+              <a:rPr lang="en-US" altLang="zh-TW"/>
               <a:t>Click to edit Master title style</a:t>
             </a:r>
             <a:endParaRPr lang="zh-TW" altLang="en-US"/>
@@ -1891,7 +1891,7 @@
           <a:p>
             <a:fld id="{76993D8F-CF75-407B-8F8C-987B01043C6A}" type="datetimeFigureOut">
               <a:rPr lang="vi-VN" smtClean="0"/>
-              <a:t>08/10/2022</a:t>
+              <a:t>20/04/2024</a:t>
             </a:fld>
             <a:endParaRPr lang="vi-VN"/>
           </a:p>
@@ -1986,7 +1986,7 @@
           <a:p>
             <a:fld id="{76993D8F-CF75-407B-8F8C-987B01043C6A}" type="datetimeFigureOut">
               <a:rPr lang="vi-VN" smtClean="0"/>
-              <a:t>08/10/2022</a:t>
+              <a:t>20/04/2024</a:t>
             </a:fld>
             <a:endParaRPr lang="vi-VN"/>
           </a:p>
@@ -2089,7 +2089,7 @@
           </a:lstStyle>
           <a:p>
             <a:r>
-              <a:rPr lang="en-US" altLang="zh-TW" smtClean="0"/>
+              <a:rPr lang="en-US" altLang="zh-TW"/>
               <a:t>Click to edit Master title style</a:t>
             </a:r>
             <a:endParaRPr lang="zh-TW" altLang="en-US"/>
@@ -2146,35 +2146,35 @@
           <a:p>
             <a:pPr lvl="0"/>
             <a:r>
-              <a:rPr lang="en-US" altLang="zh-TW" smtClean="0"/>
+              <a:rPr lang="en-US" altLang="zh-TW"/>
               <a:t>Edit Master text styles</a:t>
             </a:r>
           </a:p>
           <a:p>
             <a:pPr lvl="1"/>
             <a:r>
-              <a:rPr lang="en-US" altLang="zh-TW" smtClean="0"/>
+              <a:rPr lang="en-US" altLang="zh-TW"/>
               <a:t>Second level</a:t>
             </a:r>
           </a:p>
           <a:p>
             <a:pPr lvl="2"/>
             <a:r>
-              <a:rPr lang="en-US" altLang="zh-TW" smtClean="0"/>
+              <a:rPr lang="en-US" altLang="zh-TW"/>
               <a:t>Third level</a:t>
             </a:r>
           </a:p>
           <a:p>
             <a:pPr lvl="3"/>
             <a:r>
-              <a:rPr lang="en-US" altLang="zh-TW" smtClean="0"/>
+              <a:rPr lang="en-US" altLang="zh-TW"/>
               <a:t>Fourth level</a:t>
             </a:r>
           </a:p>
           <a:p>
             <a:pPr lvl="4"/>
             <a:r>
-              <a:rPr lang="en-US" altLang="zh-TW" smtClean="0"/>
+              <a:rPr lang="en-US" altLang="zh-TW"/>
               <a:t>Fifth level</a:t>
             </a:r>
             <a:endParaRPr lang="zh-TW" altLang="en-US"/>
@@ -2240,7 +2240,7 @@
           <a:p>
             <a:pPr lvl="0"/>
             <a:r>
-              <a:rPr lang="en-US" altLang="zh-TW" smtClean="0"/>
+              <a:rPr lang="en-US" altLang="zh-TW"/>
               <a:t>Edit Master text styles</a:t>
             </a:r>
           </a:p>
@@ -2263,7 +2263,7 @@
           <a:p>
             <a:fld id="{76993D8F-CF75-407B-8F8C-987B01043C6A}" type="datetimeFigureOut">
               <a:rPr lang="vi-VN" smtClean="0"/>
-              <a:t>08/10/2022</a:t>
+              <a:t>20/04/2024</a:t>
             </a:fld>
             <a:endParaRPr lang="vi-VN"/>
           </a:p>
@@ -2366,7 +2366,7 @@
           </a:lstStyle>
           <a:p>
             <a:r>
-              <a:rPr lang="en-US" altLang="zh-TW" smtClean="0"/>
+              <a:rPr lang="en-US" altLang="zh-TW"/>
               <a:t>Click to edit Master title style</a:t>
             </a:r>
             <a:endParaRPr lang="zh-TW" altLang="en-US"/>
@@ -2431,7 +2431,7 @@
           </a:lstStyle>
           <a:p>
             <a:r>
-              <a:rPr lang="en-US" altLang="zh-TW" smtClean="0"/>
+              <a:rPr lang="en-US" altLang="zh-TW"/>
               <a:t>Click icon to add picture</a:t>
             </a:r>
             <a:endParaRPr lang="zh-TW" altLang="en-US"/>
@@ -2497,7 +2497,7 @@
           <a:p>
             <a:pPr lvl="0"/>
             <a:r>
-              <a:rPr lang="en-US" altLang="zh-TW" smtClean="0"/>
+              <a:rPr lang="en-US" altLang="zh-TW"/>
               <a:t>Edit Master text styles</a:t>
             </a:r>
           </a:p>
@@ -2520,7 +2520,7 @@
           <a:p>
             <a:fld id="{76993D8F-CF75-407B-8F8C-987B01043C6A}" type="datetimeFigureOut">
               <a:rPr lang="vi-VN" smtClean="0"/>
-              <a:t>08/10/2022</a:t>
+              <a:t>20/04/2024</a:t>
             </a:fld>
             <a:endParaRPr lang="vi-VN"/>
           </a:p>
@@ -2634,10 +2634,9 @@
           <a:lstStyle/>
           <a:p>
             <a:r>
-              <a:rPr lang="zh-TW" altLang="en-US" smtClean="0"/>
+              <a:rPr lang="zh-TW" altLang="en-US"/>
               <a:t>按一下以編輯母片標題樣式</a:t>
             </a:r>
-            <a:endParaRPr lang="zh-TW" altLang="en-US"/>
           </a:p>
         </p:txBody>
       </p:sp>
@@ -2668,38 +2667,37 @@
           <a:p>
             <a:pPr lvl="0"/>
             <a:r>
-              <a:rPr lang="zh-TW" altLang="en-US" smtClean="0"/>
+              <a:rPr lang="zh-TW" altLang="en-US"/>
               <a:t>按一下以編輯母片文字樣式</a:t>
             </a:r>
           </a:p>
           <a:p>
             <a:pPr lvl="1"/>
             <a:r>
-              <a:rPr lang="zh-TW" altLang="en-US" smtClean="0"/>
+              <a:rPr lang="zh-TW" altLang="en-US"/>
               <a:t>第二層</a:t>
             </a:r>
           </a:p>
           <a:p>
             <a:pPr lvl="2"/>
             <a:r>
-              <a:rPr lang="zh-TW" altLang="en-US" smtClean="0"/>
+              <a:rPr lang="zh-TW" altLang="en-US"/>
               <a:t>第三層</a:t>
             </a:r>
           </a:p>
           <a:p>
             <a:pPr lvl="3"/>
             <a:r>
-              <a:rPr lang="zh-TW" altLang="en-US" smtClean="0"/>
+              <a:rPr lang="zh-TW" altLang="en-US"/>
               <a:t>第四層</a:t>
             </a:r>
           </a:p>
           <a:p>
             <a:pPr lvl="4"/>
             <a:r>
-              <a:rPr lang="zh-TW" altLang="en-US" smtClean="0"/>
+              <a:rPr lang="zh-TW" altLang="en-US"/>
               <a:t>第五層</a:t>
             </a:r>
-            <a:endParaRPr lang="zh-TW" altLang="en-US"/>
           </a:p>
         </p:txBody>
       </p:sp>
@@ -2738,7 +2736,7 @@
           <a:p>
             <a:fld id="{76993D8F-CF75-407B-8F8C-987B01043C6A}" type="datetimeFigureOut">
               <a:rPr lang="vi-VN" smtClean="0"/>
-              <a:t>08/10/2022</a:t>
+              <a:t>20/04/2024</a:t>
             </a:fld>
             <a:endParaRPr lang="vi-VN"/>
           </a:p>
@@ -3150,24 +3148,7 @@
                 <a:latin typeface="微軟正黑體" pitchFamily="34" charset="-120"/>
                 <a:ea typeface="微軟正黑體" pitchFamily="34" charset="-120"/>
               </a:rPr>
-              <a:t>因</a:t>
-            </a:r>
-            <a:r>
-              <a:rPr lang="zh-TW" altLang="en-US" sz="7200" b="1" i="1" dirty="0">
-                <a:solidFill>
-                  <a:srgbClr val="660033"/>
-                </a:solidFill>
-                <a:effectLst>
-                  <a:outerShdw blurRad="38100" dist="38100" dir="2700000" algn="tl">
-                    <a:srgbClr val="000000">
-                      <a:alpha val="43137"/>
-                    </a:srgbClr>
-                  </a:outerShdw>
-                </a:effectLst>
-                <a:latin typeface="微軟正黑體" pitchFamily="34" charset="-120"/>
-                <a:ea typeface="微軟正黑體" pitchFamily="34" charset="-120"/>
-              </a:rPr>
-              <a:t>祂活著</a:t>
+              <a:t>因祂活著</a:t>
             </a:r>
           </a:p>
         </p:txBody>
@@ -3318,7 +3299,7 @@
                 <a:latin typeface="Microsoft JhengHei" panose="020B0604030504040204" pitchFamily="34" charset="-120"/>
                 <a:ea typeface="Microsoft JhengHei" panose="020B0604030504040204" pitchFamily="34" charset="-120"/>
               </a:rPr>
-              <a:t>正</a:t>
+              <a:t>正歌</a:t>
             </a:r>
             <a:r>
               <a:rPr lang="en-US" sz="4267" b="1" dirty="0">
@@ -3422,27 +3403,7 @@
                 <a:latin typeface="Microsoft JhengHei" panose="020B0604030504040204" pitchFamily="34" charset="-120"/>
                 <a:ea typeface="Microsoft JhengHei" panose="020B0604030504040204" pitchFamily="34" charset="-120"/>
               </a:rPr>
-              <a:t>復活 </a:t>
-            </a:r>
-            <a:r>
-              <a:rPr lang="zh-TW" altLang="en-US" sz="6400" b="1" dirty="0">
-                <a:solidFill>
-                  <a:srgbClr val="660033"/>
-                </a:solidFill>
-                <a:latin typeface="Microsoft JhengHei" panose="020B0604030504040204" pitchFamily="34" charset="-120"/>
-                <a:ea typeface="Microsoft JhengHei" panose="020B0604030504040204" pitchFamily="34" charset="-120"/>
-              </a:rPr>
-              <a:t> 使</a:t>
-            </a:r>
-            <a:r>
-              <a:rPr lang="zh-TW" altLang="en-US" sz="6400" b="1" dirty="0">
-                <a:solidFill>
-                  <a:srgbClr val="660033"/>
-                </a:solidFill>
-                <a:latin typeface="Microsoft JhengHei" panose="020B0604030504040204" pitchFamily="34" charset="-120"/>
-                <a:ea typeface="Microsoft JhengHei" panose="020B0604030504040204" pitchFamily="34" charset="-120"/>
-              </a:rPr>
-              <a:t>我得自由</a:t>
+              <a:t>復活  使我得自由</a:t>
             </a:r>
             <a:r>
               <a:rPr lang="en-US" sz="6400" b="1" dirty="0">
@@ -3527,7 +3488,7 @@
                 <a:latin typeface="Microsoft JhengHei" panose="020B0604030504040204" pitchFamily="34" charset="-120"/>
                 <a:ea typeface="Microsoft JhengHei" panose="020B0604030504040204" pitchFamily="34" charset="-120"/>
               </a:rPr>
-              <a:t>正</a:t>
+              <a:t>正歌</a:t>
             </a:r>
             <a:r>
               <a:rPr lang="en-US" sz="4267" b="1" dirty="0">
@@ -3611,27 +3572,7 @@
                 <a:latin typeface="Microsoft JhengHei" panose="020B0604030504040204" pitchFamily="34" charset="-120"/>
                 <a:ea typeface="Microsoft JhengHei" panose="020B0604030504040204" pitchFamily="34" charset="-120"/>
               </a:rPr>
-              <a:t>因祂活著 </a:t>
-            </a:r>
-            <a:r>
-              <a:rPr lang="zh-TW" altLang="en-US" sz="6400" b="1" dirty="0">
-                <a:solidFill>
-                  <a:srgbClr val="660033"/>
-                </a:solidFill>
-                <a:latin typeface="Microsoft JhengHei" panose="020B0604030504040204" pitchFamily="34" charset="-120"/>
-                <a:ea typeface="Microsoft JhengHei" panose="020B0604030504040204" pitchFamily="34" charset="-120"/>
-              </a:rPr>
-              <a:t> 我</a:t>
-            </a:r>
-            <a:r>
-              <a:rPr lang="zh-TW" altLang="en-US" sz="6400" b="1" dirty="0">
-                <a:solidFill>
-                  <a:srgbClr val="660033"/>
-                </a:solidFill>
-                <a:latin typeface="Microsoft JhengHei" panose="020B0604030504040204" pitchFamily="34" charset="-120"/>
-                <a:ea typeface="Microsoft JhengHei" panose="020B0604030504040204" pitchFamily="34" charset="-120"/>
-              </a:rPr>
-              <a:t>能面對明天</a:t>
+              <a:t>因祂活著  我能面對明天</a:t>
             </a:r>
             <a:endParaRPr lang="vi-VN" sz="6400" b="1" dirty="0">
               <a:solidFill>
@@ -3653,27 +3594,7 @@
                 <a:latin typeface="Microsoft JhengHei" panose="020B0604030504040204" pitchFamily="34" charset="-120"/>
                 <a:ea typeface="Microsoft JhengHei" panose="020B0604030504040204" pitchFamily="34" charset="-120"/>
               </a:rPr>
-              <a:t>因祂活著 </a:t>
-            </a:r>
-            <a:r>
-              <a:rPr lang="zh-TW" altLang="en-US" sz="6400" b="1" dirty="0">
-                <a:solidFill>
-                  <a:srgbClr val="660033"/>
-                </a:solidFill>
-                <a:latin typeface="Microsoft JhengHei" panose="020B0604030504040204" pitchFamily="34" charset="-120"/>
-                <a:ea typeface="Microsoft JhengHei" panose="020B0604030504040204" pitchFamily="34" charset="-120"/>
-              </a:rPr>
-              <a:t> 不</a:t>
-            </a:r>
-            <a:r>
-              <a:rPr lang="zh-TW" altLang="en-US" sz="6400" b="1" dirty="0">
-                <a:solidFill>
-                  <a:srgbClr val="660033"/>
-                </a:solidFill>
-                <a:latin typeface="Microsoft JhengHei" panose="020B0604030504040204" pitchFamily="34" charset="-120"/>
-                <a:ea typeface="Microsoft JhengHei" panose="020B0604030504040204" pitchFamily="34" charset="-120"/>
-              </a:rPr>
-              <a:t>再懼怕</a:t>
+              <a:t>因祂活著  不再懼怕</a:t>
             </a:r>
             <a:endParaRPr lang="vi-VN" sz="6400" b="1" dirty="0">
               <a:solidFill>
@@ -3726,7 +3647,7 @@
                 <a:latin typeface="Microsoft JhengHei" panose="020B0604030504040204" pitchFamily="34" charset="-120"/>
                 <a:ea typeface="Microsoft JhengHei" panose="020B0604030504040204" pitchFamily="34" charset="-120"/>
               </a:rPr>
-              <a:t>副</a:t>
+              <a:t>副歌</a:t>
             </a:r>
             <a:r>
               <a:rPr lang="en-US" sz="4267" b="1" dirty="0">
@@ -3810,27 +3731,7 @@
                 <a:latin typeface="Microsoft JhengHei" panose="020B0604030504040204" pitchFamily="34" charset="-120"/>
                 <a:ea typeface="Microsoft JhengHei" panose="020B0604030504040204" pitchFamily="34" charset="-120"/>
               </a:rPr>
-              <a:t>我深知道 </a:t>
-            </a:r>
-            <a:r>
-              <a:rPr lang="zh-TW" altLang="en-US" sz="6400" b="1" dirty="0">
-                <a:solidFill>
-                  <a:srgbClr val="660033"/>
-                </a:solidFill>
-                <a:latin typeface="Microsoft JhengHei" panose="020B0604030504040204" pitchFamily="34" charset="-120"/>
-                <a:ea typeface="Microsoft JhengHei" panose="020B0604030504040204" pitchFamily="34" charset="-120"/>
-              </a:rPr>
-              <a:t> 祂</a:t>
-            </a:r>
-            <a:r>
-              <a:rPr lang="zh-TW" altLang="en-US" sz="6400" b="1" dirty="0">
-                <a:solidFill>
-                  <a:srgbClr val="660033"/>
-                </a:solidFill>
-                <a:latin typeface="Microsoft JhengHei" panose="020B0604030504040204" pitchFamily="34" charset="-120"/>
-                <a:ea typeface="Microsoft JhengHei" panose="020B0604030504040204" pitchFamily="34" charset="-120"/>
-              </a:rPr>
-              <a:t>掌管明天</a:t>
+              <a:t>我深知道  祂掌管明天</a:t>
             </a:r>
             <a:endParaRPr lang="vi-VN" sz="6400" b="1" dirty="0">
               <a:solidFill>
@@ -3925,7 +3826,7 @@
                 <a:latin typeface="Microsoft JhengHei" panose="020B0604030504040204" pitchFamily="34" charset="-120"/>
                 <a:ea typeface="Microsoft JhengHei" panose="020B0604030504040204" pitchFamily="34" charset="-120"/>
               </a:rPr>
-              <a:t>副</a:t>
+              <a:t>副歌</a:t>
             </a:r>
             <a:r>
               <a:rPr lang="en-US" sz="4267" b="1" dirty="0">
